--- a/week6 - Databases 2/M8Prog laravel X - Selecting.pptx
+++ b/week6 - Databases 2/M8Prog laravel X - Selecting.pptx
@@ -13,7 +13,9 @@
     <p:sldId id="289" r:id="rId7"/>
     <p:sldId id="290" r:id="rId8"/>
     <p:sldId id="291" r:id="rId9"/>
-    <p:sldId id="293" r:id="rId10"/>
+    <p:sldId id="294" r:id="rId10"/>
+    <p:sldId id="295" r:id="rId11"/>
+    <p:sldId id="293" r:id="rId12"/>
   </p:sldIdLst>
   <p:sldSz cx="12192000" cy="6858000"/>
   <p:notesSz cx="6858000" cy="9144000"/>
@@ -124,6 +126,7 @@
 <p1510:revInfo xmlns:a="http://schemas.openxmlformats.org/drawingml/2006/main" xmlns:r="http://schemas.openxmlformats.org/officeDocument/2006/relationships" xmlns:p1510="http://schemas.microsoft.com/office/powerpoint/2015/10/main">
   <p1510:revLst>
     <p1510:client id="{028F20D3-CD2A-4DDC-A262-9275697B7334}" v="1" dt="2026-04-23T15:59:08.215"/>
+    <p1510:client id="{6C97C029-FD2B-43BA-9EA6-CDA4D2C767AE}" v="2" dt="2026-04-24T06:45:02.375"/>
   </p1510:revLst>
 </p1510:revInfo>
 </file>
@@ -133,7 +136,7 @@
   <pc:docChgLst>
     <pc:chgData name="Dragan Javorac" userId="913c2858-fb97-4c6e-a42c-b1f1a16b225e" providerId="ADAL" clId="{BC00D9DF-F858-4149-8B7B-F211D448CEDA}"/>
     <pc:docChg chg="undo custSel addSld delSld modSld sldOrd">
-      <pc:chgData name="Dragan Javorac" userId="913c2858-fb97-4c6e-a42c-b1f1a16b225e" providerId="ADAL" clId="{BC00D9DF-F858-4149-8B7B-F211D448CEDA}" dt="2026-04-23T15:59:38.416" v="1838" actId="14100"/>
+      <pc:chgData name="Dragan Javorac" userId="913c2858-fb97-4c6e-a42c-b1f1a16b225e" providerId="ADAL" clId="{BC00D9DF-F858-4149-8B7B-F211D448CEDA}" dt="2026-04-24T06:46:58.491" v="2150" actId="14100"/>
       <pc:docMkLst>
         <pc:docMk/>
       </pc:docMkLst>
@@ -269,9 +272,199 @@
           </ac:picMkLst>
         </pc:picChg>
       </pc:sldChg>
+      <pc:sldChg chg="addSp delSp modSp add mod">
+        <pc:chgData name="Dragan Javorac" userId="913c2858-fb97-4c6e-a42c-b1f1a16b225e" providerId="ADAL" clId="{BC00D9DF-F858-4149-8B7B-F211D448CEDA}" dt="2026-04-24T06:45:55.762" v="2051" actId="478"/>
+        <pc:sldMkLst>
+          <pc:docMk/>
+          <pc:sldMk cId="2655874426" sldId="294"/>
+        </pc:sldMkLst>
+        <pc:spChg chg="mod">
+          <ac:chgData name="Dragan Javorac" userId="913c2858-fb97-4c6e-a42c-b1f1a16b225e" providerId="ADAL" clId="{BC00D9DF-F858-4149-8B7B-F211D448CEDA}" dt="2026-04-24T06:43:37.962" v="1846" actId="20577"/>
+          <ac:spMkLst>
+            <pc:docMk/>
+            <pc:sldMk cId="2655874426" sldId="294"/>
+            <ac:spMk id="2" creationId="{7E314DAE-0A48-B16E-D1B5-72584A28BE97}"/>
+          </ac:spMkLst>
+        </pc:spChg>
+        <pc:spChg chg="mod">
+          <ac:chgData name="Dragan Javorac" userId="913c2858-fb97-4c6e-a42c-b1f1a16b225e" providerId="ADAL" clId="{BC00D9DF-F858-4149-8B7B-F211D448CEDA}" dt="2026-04-24T06:44:53.012" v="2044" actId="27636"/>
+          <ac:spMkLst>
+            <pc:docMk/>
+            <pc:sldMk cId="2655874426" sldId="294"/>
+            <ac:spMk id="3" creationId="{D56B0860-ECED-4907-589D-BCE4AC59A132}"/>
+          </ac:spMkLst>
+        </pc:spChg>
+        <pc:grpChg chg="add mod">
+          <ac:chgData name="Dragan Javorac" userId="913c2858-fb97-4c6e-a42c-b1f1a16b225e" providerId="ADAL" clId="{BC00D9DF-F858-4149-8B7B-F211D448CEDA}" dt="2026-04-24T06:45:02.374" v="2047" actId="164"/>
+          <ac:grpSpMkLst>
+            <pc:docMk/>
+            <pc:sldMk cId="2655874426" sldId="294"/>
+            <ac:grpSpMk id="9" creationId="{BE656D77-3065-8C69-F676-955D22119FAB}"/>
+          </ac:grpSpMkLst>
+        </pc:grpChg>
+        <pc:picChg chg="add mod modCrop">
+          <ac:chgData name="Dragan Javorac" userId="913c2858-fb97-4c6e-a42c-b1f1a16b225e" providerId="ADAL" clId="{BC00D9DF-F858-4149-8B7B-F211D448CEDA}" dt="2026-04-24T06:45:02.374" v="2047" actId="164"/>
+          <ac:picMkLst>
+            <pc:docMk/>
+            <pc:sldMk cId="2655874426" sldId="294"/>
+            <ac:picMk id="4" creationId="{7BF2199A-BCA9-AA0E-DE77-FD7F69D70777}"/>
+          </ac:picMkLst>
+        </pc:picChg>
+        <pc:picChg chg="del">
+          <ac:chgData name="Dragan Javorac" userId="913c2858-fb97-4c6e-a42c-b1f1a16b225e" providerId="ADAL" clId="{BC00D9DF-F858-4149-8B7B-F211D448CEDA}" dt="2026-04-24T06:44:10.357" v="1964" actId="478"/>
+          <ac:picMkLst>
+            <pc:docMk/>
+            <pc:sldMk cId="2655874426" sldId="294"/>
+            <ac:picMk id="6" creationId="{B825179F-19D6-70CC-B937-CD42643E97F9}"/>
+          </ac:picMkLst>
+        </pc:picChg>
+        <pc:picChg chg="del">
+          <ac:chgData name="Dragan Javorac" userId="913c2858-fb97-4c6e-a42c-b1f1a16b225e" providerId="ADAL" clId="{BC00D9DF-F858-4149-8B7B-F211D448CEDA}" dt="2026-04-24T06:44:07.886" v="1962" actId="478"/>
+          <ac:picMkLst>
+            <pc:docMk/>
+            <pc:sldMk cId="2655874426" sldId="294"/>
+            <ac:picMk id="8" creationId="{358630EA-4977-5EBD-ECC1-4B313D6128FE}"/>
+          </ac:picMkLst>
+        </pc:picChg>
+        <pc:picChg chg="add del">
+          <ac:chgData name="Dragan Javorac" userId="913c2858-fb97-4c6e-a42c-b1f1a16b225e" providerId="ADAL" clId="{BC00D9DF-F858-4149-8B7B-F211D448CEDA}" dt="2026-04-24T06:45:55.762" v="2051" actId="478"/>
+          <ac:picMkLst>
+            <pc:docMk/>
+            <pc:sldMk cId="2655874426" sldId="294"/>
+            <ac:picMk id="11" creationId="{D248F946-4AD4-01AC-027F-04C2232EC233}"/>
+          </ac:picMkLst>
+        </pc:picChg>
+        <pc:picChg chg="add del">
+          <ac:chgData name="Dragan Javorac" userId="913c2858-fb97-4c6e-a42c-b1f1a16b225e" providerId="ADAL" clId="{BC00D9DF-F858-4149-8B7B-F211D448CEDA}" dt="2026-04-24T06:45:55.762" v="2051" actId="478"/>
+          <ac:picMkLst>
+            <pc:docMk/>
+            <pc:sldMk cId="2655874426" sldId="294"/>
+            <ac:picMk id="13" creationId="{9F604FE8-3B75-BF2C-8AAD-6D11792917D3}"/>
+          </ac:picMkLst>
+        </pc:picChg>
+        <pc:inkChg chg="add mod">
+          <ac:chgData name="Dragan Javorac" userId="913c2858-fb97-4c6e-a42c-b1f1a16b225e" providerId="ADAL" clId="{BC00D9DF-F858-4149-8B7B-F211D448CEDA}" dt="2026-04-24T06:45:02.374" v="2047" actId="164"/>
+          <ac:inkMkLst>
+            <pc:docMk/>
+            <pc:sldMk cId="2655874426" sldId="294"/>
+            <ac:inkMk id="5" creationId="{B9B3C4BB-1E01-B331-6B45-C31885BF301B}"/>
+          </ac:inkMkLst>
+        </pc:inkChg>
+        <pc:inkChg chg="add mod">
+          <ac:chgData name="Dragan Javorac" userId="913c2858-fb97-4c6e-a42c-b1f1a16b225e" providerId="ADAL" clId="{BC00D9DF-F858-4149-8B7B-F211D448CEDA}" dt="2026-04-24T06:45:02.374" v="2047" actId="164"/>
+          <ac:inkMkLst>
+            <pc:docMk/>
+            <pc:sldMk cId="2655874426" sldId="294"/>
+            <ac:inkMk id="7" creationId="{ED677332-2367-8600-041F-A134C87B06E6}"/>
+          </ac:inkMkLst>
+        </pc:inkChg>
+      </pc:sldChg>
+      <pc:sldChg chg="delSp modSp add mod">
+        <pc:chgData name="Dragan Javorac" userId="913c2858-fb97-4c6e-a42c-b1f1a16b225e" providerId="ADAL" clId="{BC00D9DF-F858-4149-8B7B-F211D448CEDA}" dt="2026-04-24T06:46:58.491" v="2150" actId="14100"/>
+        <pc:sldMkLst>
+          <pc:docMk/>
+          <pc:sldMk cId="1743946096" sldId="295"/>
+        </pc:sldMkLst>
+        <pc:spChg chg="mod">
+          <ac:chgData name="Dragan Javorac" userId="913c2858-fb97-4c6e-a42c-b1f1a16b225e" providerId="ADAL" clId="{BC00D9DF-F858-4149-8B7B-F211D448CEDA}" dt="2026-04-24T06:46:02.196" v="2069" actId="20577"/>
+          <ac:spMkLst>
+            <pc:docMk/>
+            <pc:sldMk cId="1743946096" sldId="295"/>
+            <ac:spMk id="2" creationId="{055C9F66-C13A-76E8-4E18-39989208F4E7}"/>
+          </ac:spMkLst>
+        </pc:spChg>
+        <pc:spChg chg="mod">
+          <ac:chgData name="Dragan Javorac" userId="913c2858-fb97-4c6e-a42c-b1f1a16b225e" providerId="ADAL" clId="{BC00D9DF-F858-4149-8B7B-F211D448CEDA}" dt="2026-04-24T06:46:58.491" v="2150" actId="14100"/>
+          <ac:spMkLst>
+            <pc:docMk/>
+            <pc:sldMk cId="1743946096" sldId="295"/>
+            <ac:spMk id="3" creationId="{B2C358F4-6235-100C-631E-76878102316E}"/>
+          </ac:spMkLst>
+        </pc:spChg>
+        <pc:grpChg chg="del">
+          <ac:chgData name="Dragan Javorac" userId="913c2858-fb97-4c6e-a42c-b1f1a16b225e" providerId="ADAL" clId="{BC00D9DF-F858-4149-8B7B-F211D448CEDA}" dt="2026-04-24T06:46:05.270" v="2071" actId="478"/>
+          <ac:grpSpMkLst>
+            <pc:docMk/>
+            <pc:sldMk cId="1743946096" sldId="295"/>
+            <ac:grpSpMk id="9" creationId="{18E171EB-56F8-5150-DE79-51122B777D46}"/>
+          </ac:grpSpMkLst>
+        </pc:grpChg>
+        <pc:picChg chg="mod">
+          <ac:chgData name="Dragan Javorac" userId="913c2858-fb97-4c6e-a42c-b1f1a16b225e" providerId="ADAL" clId="{BC00D9DF-F858-4149-8B7B-F211D448CEDA}" dt="2026-04-24T06:46:16.947" v="2078" actId="14100"/>
+          <ac:picMkLst>
+            <pc:docMk/>
+            <pc:sldMk cId="1743946096" sldId="295"/>
+            <ac:picMk id="11" creationId="{D36FCC27-FEF9-4814-10AB-E2FF3AF37454}"/>
+          </ac:picMkLst>
+        </pc:picChg>
+        <pc:picChg chg="mod">
+          <ac:chgData name="Dragan Javorac" userId="913c2858-fb97-4c6e-a42c-b1f1a16b225e" providerId="ADAL" clId="{BC00D9DF-F858-4149-8B7B-F211D448CEDA}" dt="2026-04-24T06:46:14.402" v="2076" actId="1076"/>
+          <ac:picMkLst>
+            <pc:docMk/>
+            <pc:sldMk cId="1743946096" sldId="295"/>
+            <ac:picMk id="13" creationId="{B9EF3E27-642D-CD78-223A-3B1D6B070E75}"/>
+          </ac:picMkLst>
+        </pc:picChg>
+      </pc:sldChg>
     </pc:docChg>
   </pc:docChgLst>
 </pc:chgInfo>
+</file>
+
+<file path=ppt/ink/ink1.xml><?xml version="1.0" encoding="utf-8"?>
+<inkml:ink xmlns:inkml="http://www.w3.org/2003/InkML">
+  <inkml:definitions>
+    <inkml:context xml:id="ctx0">
+      <inkml:inkSource xml:id="inkSrc0">
+        <inkml:traceFormat>
+          <inkml:channel name="X" type="integer" min="-2.14748E9" max="2.14748E9" units="cm"/>
+          <inkml:channel name="Y" type="integer" min="-2.14748E9" max="2.14748E9" units="cm"/>
+          <inkml:channel name="F" type="integer" max="32767" units="dev"/>
+        </inkml:traceFormat>
+        <inkml:channelProperties>
+          <inkml:channelProperty channel="X" name="resolution" value="1000" units="1/cm"/>
+          <inkml:channelProperty channel="Y" name="resolution" value="1000" units="1/cm"/>
+          <inkml:channelProperty channel="F" name="resolution" value="0" units="1/dev"/>
+        </inkml:channelProperties>
+      </inkml:inkSource>
+      <inkml:timestamp xml:id="ts0" timeString="2026-04-24T06:44:20.262"/>
+    </inkml:context>
+    <inkml:brush xml:id="br0">
+      <inkml:brushProperty name="width" value="0.05" units="cm"/>
+      <inkml:brushProperty name="height" value="0.05" units="cm"/>
+      <inkml:brushProperty name="color" value="#E71224"/>
+    </inkml:brush>
+  </inkml:definitions>
+  <inkml:trace contextRef="#ctx0" brushRef="#br0">1 0 24575,'4'0'0,"10"0"0,16 0 0,19 5 0,28 0 0,38 5 0,13 4 0,15 0 0,-9-2 0,-22-3 0,-18-4 0,-16-2 0,-18-2 0,21 38 0,-52-40-6784,-30-19 5377</inkml:trace>
+</inkml:ink>
+</file>
+
+<file path=ppt/ink/ink2.xml><?xml version="1.0" encoding="utf-8"?>
+<inkml:ink xmlns:inkml="http://www.w3.org/2003/InkML">
+  <inkml:definitions>
+    <inkml:context xml:id="ctx0">
+      <inkml:inkSource xml:id="inkSrc0">
+        <inkml:traceFormat>
+          <inkml:channel name="X" type="integer" min="-2.14748E9" max="2.14748E9" units="cm"/>
+          <inkml:channel name="Y" type="integer" min="-2.14748E9" max="2.14748E9" units="cm"/>
+          <inkml:channel name="F" type="integer" max="32767" units="dev"/>
+        </inkml:traceFormat>
+        <inkml:channelProperties>
+          <inkml:channelProperty channel="X" name="resolution" value="1000" units="1/cm"/>
+          <inkml:channelProperty channel="Y" name="resolution" value="1000" units="1/cm"/>
+          <inkml:channelProperty channel="F" name="resolution" value="0" units="1/dev"/>
+        </inkml:channelProperties>
+      </inkml:inkSource>
+      <inkml:timestamp xml:id="ts0" timeString="2026-04-24T06:44:21.559"/>
+    </inkml:context>
+    <inkml:brush xml:id="br0">
+      <inkml:brushProperty name="width" value="0.05" units="cm"/>
+      <inkml:brushProperty name="height" value="0.05" units="cm"/>
+      <inkml:brushProperty name="color" value="#E71224"/>
+    </inkml:brush>
+  </inkml:definitions>
+  <inkml:trace contextRef="#ctx0" brushRef="#br0">1 0 24575,'530'27'0,"-238"-8"0,-274-17 0,0 0 0,0 2 0,0 0 0,0 1 0,-1 0 0,21 10 0,-25-9 0,-10-5 10,1 1 0,0 0 0,-1-1 0,1 0 0,0 0 0,0 0 0,0 0 0,0-1 0,0 1 0,0-1 0,5-1 0,-8 1-55,0-1 0,0 0 0,-1 1 0,1-1 0,0 0 0,0 0 0,0 0 0,0 1 0,-1-1 0,1 0 0,0 0 0,-1 0 0,1 0 0,-1-1 0,1 1 0,-1 0 0,0 0 0,1 0 0,-1 0 0,0 0 0,0 0 0,0-1 0,0 1 0,0 0 0,0 0 0,0 0 0,0-1 0,0 1 0,-1 0 0,1 0 0,0 0 0,-2-2 0,0-13-6781</inkml:trace>
+</inkml:ink>
 </file>
 
 <file path=ppt/slideLayouts/slideLayout1.xml><?xml version="1.0" encoding="utf-8"?>
@@ -423,7 +616,7 @@
           <a:p>
             <a:fld id="{AD36792F-A28E-4983-A7F5-F40ED51D6004}" type="datetimeFigureOut">
               <a:rPr lang="nl-NL" smtClean="0"/>
-              <a:t>23-4-2026</a:t>
+              <a:t>24-4-2026</a:t>
             </a:fld>
             <a:endParaRPr lang="nl-NL"/>
           </a:p>
@@ -623,7 +816,7 @@
           <a:p>
             <a:fld id="{AD36792F-A28E-4983-A7F5-F40ED51D6004}" type="datetimeFigureOut">
               <a:rPr lang="nl-NL" smtClean="0"/>
-              <a:t>23-4-2026</a:t>
+              <a:t>24-4-2026</a:t>
             </a:fld>
             <a:endParaRPr lang="nl-NL"/>
           </a:p>
@@ -833,7 +1026,7 @@
           <a:p>
             <a:fld id="{AD36792F-A28E-4983-A7F5-F40ED51D6004}" type="datetimeFigureOut">
               <a:rPr lang="nl-NL" smtClean="0"/>
-              <a:t>23-4-2026</a:t>
+              <a:t>24-4-2026</a:t>
             </a:fld>
             <a:endParaRPr lang="nl-NL"/>
           </a:p>
@@ -1033,7 +1226,7 @@
           <a:p>
             <a:fld id="{AD36792F-A28E-4983-A7F5-F40ED51D6004}" type="datetimeFigureOut">
               <a:rPr lang="nl-NL" smtClean="0"/>
-              <a:t>23-4-2026</a:t>
+              <a:t>24-4-2026</a:t>
             </a:fld>
             <a:endParaRPr lang="nl-NL"/>
           </a:p>
@@ -1309,7 +1502,7 @@
           <a:p>
             <a:fld id="{AD36792F-A28E-4983-A7F5-F40ED51D6004}" type="datetimeFigureOut">
               <a:rPr lang="nl-NL" smtClean="0"/>
-              <a:t>23-4-2026</a:t>
+              <a:t>24-4-2026</a:t>
             </a:fld>
             <a:endParaRPr lang="nl-NL"/>
           </a:p>
@@ -1577,7 +1770,7 @@
           <a:p>
             <a:fld id="{AD36792F-A28E-4983-A7F5-F40ED51D6004}" type="datetimeFigureOut">
               <a:rPr lang="nl-NL" smtClean="0"/>
-              <a:t>23-4-2026</a:t>
+              <a:t>24-4-2026</a:t>
             </a:fld>
             <a:endParaRPr lang="nl-NL"/>
           </a:p>
@@ -1992,7 +2185,7 @@
           <a:p>
             <a:fld id="{AD36792F-A28E-4983-A7F5-F40ED51D6004}" type="datetimeFigureOut">
               <a:rPr lang="nl-NL" smtClean="0"/>
-              <a:t>23-4-2026</a:t>
+              <a:t>24-4-2026</a:t>
             </a:fld>
             <a:endParaRPr lang="nl-NL"/>
           </a:p>
@@ -2134,7 +2327,7 @@
           <a:p>
             <a:fld id="{AD36792F-A28E-4983-A7F5-F40ED51D6004}" type="datetimeFigureOut">
               <a:rPr lang="nl-NL" smtClean="0"/>
-              <a:t>23-4-2026</a:t>
+              <a:t>24-4-2026</a:t>
             </a:fld>
             <a:endParaRPr lang="nl-NL"/>
           </a:p>
@@ -2247,7 +2440,7 @@
           <a:p>
             <a:fld id="{AD36792F-A28E-4983-A7F5-F40ED51D6004}" type="datetimeFigureOut">
               <a:rPr lang="nl-NL" smtClean="0"/>
-              <a:t>23-4-2026</a:t>
+              <a:t>24-4-2026</a:t>
             </a:fld>
             <a:endParaRPr lang="nl-NL"/>
           </a:p>
@@ -2560,7 +2753,7 @@
           <a:p>
             <a:fld id="{AD36792F-A28E-4983-A7F5-F40ED51D6004}" type="datetimeFigureOut">
               <a:rPr lang="nl-NL" smtClean="0"/>
-              <a:t>23-4-2026</a:t>
+              <a:t>24-4-2026</a:t>
             </a:fld>
             <a:endParaRPr lang="nl-NL"/>
           </a:p>
@@ -2849,7 +3042,7 @@
           <a:p>
             <a:fld id="{AD36792F-A28E-4983-A7F5-F40ED51D6004}" type="datetimeFigureOut">
               <a:rPr lang="nl-NL" smtClean="0"/>
-              <a:t>23-4-2026</a:t>
+              <a:t>24-4-2026</a:t>
             </a:fld>
             <a:endParaRPr lang="nl-NL"/>
           </a:p>
@@ -3099,7 +3292,7 @@
           <a:p>
             <a:fld id="{AD36792F-A28E-4983-A7F5-F40ED51D6004}" type="datetimeFigureOut">
               <a:rPr lang="nl-NL" smtClean="0"/>
-              <a:t>23-4-2026</a:t>
+              <a:t>24-4-2026</a:t>
             </a:fld>
             <a:endParaRPr lang="nl-NL"/>
           </a:p>
@@ -3586,6 +3779,473 @@
 </p:sld>
 </file>
 
+<file path=ppt/slides/slide10.xml><?xml version="1.0" encoding="utf-8"?>
+<p:sld xmlns:a="http://schemas.openxmlformats.org/drawingml/2006/main" xmlns:r="http://schemas.openxmlformats.org/officeDocument/2006/relationships" xmlns:p="http://schemas.openxmlformats.org/presentationml/2006/main">
+  <p:cSld>
+    <p:spTree>
+      <p:nvGrpSpPr>
+        <p:cNvPr id="1" name="">
+          <a:extLst>
+            <a:ext uri="{FF2B5EF4-FFF2-40B4-BE49-F238E27FC236}">
+              <a16:creationId xmlns:a16="http://schemas.microsoft.com/office/drawing/2014/main" id="{505F5FD3-51DE-3CCF-855D-54B4CB220307}"/>
+            </a:ext>
+          </a:extLst>
+        </p:cNvPr>
+        <p:cNvGrpSpPr/>
+        <p:nvPr/>
+      </p:nvGrpSpPr>
+      <p:grpSpPr>
+        <a:xfrm>
+          <a:off x="0" y="0"/>
+          <a:ext cx="0" cy="0"/>
+          <a:chOff x="0" y="0"/>
+          <a:chExt cx="0" cy="0"/>
+        </a:xfrm>
+      </p:grpSpPr>
+      <p:sp>
+        <p:nvSpPr>
+          <p:cNvPr id="2" name="Title 1">
+            <a:extLst>
+              <a:ext uri="{FF2B5EF4-FFF2-40B4-BE49-F238E27FC236}">
+                <a16:creationId xmlns:a16="http://schemas.microsoft.com/office/drawing/2014/main" id="{055C9F66-C13A-76E8-4E18-39989208F4E7}"/>
+              </a:ext>
+            </a:extLst>
+          </p:cNvPr>
+          <p:cNvSpPr>
+            <a:spLocks noGrp="1"/>
+          </p:cNvSpPr>
+          <p:nvPr>
+            <p:ph type="title"/>
+          </p:nvPr>
+        </p:nvSpPr>
+        <p:spPr/>
+        <p:txBody>
+          <a:bodyPr/>
+          <a:lstStyle/>
+          <a:p>
+            <a:r>
+              <a:rPr lang="nl-NL" dirty="0"/>
+              <a:t>Andere voorbeelden</a:t>
+            </a:r>
+          </a:p>
+        </p:txBody>
+      </p:sp>
+      <p:sp>
+        <p:nvSpPr>
+          <p:cNvPr id="3" name="Content Placeholder 2">
+            <a:extLst>
+              <a:ext uri="{FF2B5EF4-FFF2-40B4-BE49-F238E27FC236}">
+                <a16:creationId xmlns:a16="http://schemas.microsoft.com/office/drawing/2014/main" id="{B2C358F4-6235-100C-631E-76878102316E}"/>
+              </a:ext>
+            </a:extLst>
+          </p:cNvPr>
+          <p:cNvSpPr>
+            <a:spLocks noGrp="1"/>
+          </p:cNvSpPr>
+          <p:nvPr>
+            <p:ph idx="1"/>
+          </p:nvPr>
+        </p:nvSpPr>
+        <p:spPr>
+          <a:xfrm>
+            <a:off x="838199" y="1825625"/>
+            <a:ext cx="4847377" cy="3352957"/>
+          </a:xfrm>
+        </p:spPr>
+        <p:txBody>
+          <a:bodyPr>
+            <a:normAutofit/>
+          </a:bodyPr>
+          <a:lstStyle/>
+          <a:p>
+            <a:r>
+              <a:rPr lang="en-US" dirty="0"/>
+              <a:t>-&gt;</a:t>
+            </a:r>
+            <a:r>
+              <a:rPr lang="en-US" dirty="0" err="1"/>
+              <a:t>findOrFail</a:t>
+            </a:r>
+            <a:r>
+              <a:rPr lang="en-US" dirty="0"/>
+              <a:t>($id) </a:t>
+            </a:r>
+          </a:p>
+          <a:p>
+            <a:r>
+              <a:rPr lang="en-US" dirty="0"/>
+              <a:t>::</a:t>
+            </a:r>
+            <a:r>
+              <a:rPr lang="en-US" dirty="0" err="1"/>
+              <a:t>orderBy</a:t>
+            </a:r>
+            <a:r>
+              <a:rPr lang="en-US" dirty="0"/>
+              <a:t> == </a:t>
+            </a:r>
+            <a:r>
+              <a:rPr lang="en-US" dirty="0" err="1"/>
+              <a:t>sorteren</a:t>
+            </a:r>
+            <a:endParaRPr lang="en-US" dirty="0"/>
+          </a:p>
+          <a:p>
+            <a:r>
+              <a:rPr lang="en-US" dirty="0"/>
+              <a:t>-&gt;take == TOP/LIMIT</a:t>
+            </a:r>
+          </a:p>
+          <a:p>
+            <a:endParaRPr lang="en-US" dirty="0"/>
+          </a:p>
+          <a:p>
+            <a:endParaRPr lang="nl-NL" dirty="0"/>
+          </a:p>
+        </p:txBody>
+      </p:sp>
+      <p:pic>
+        <p:nvPicPr>
+          <p:cNvPr id="11" name="Picture 10">
+            <a:extLst>
+              <a:ext uri="{FF2B5EF4-FFF2-40B4-BE49-F238E27FC236}">
+                <a16:creationId xmlns:a16="http://schemas.microsoft.com/office/drawing/2014/main" id="{D36FCC27-FEF9-4814-10AB-E2FF3AF37454}"/>
+              </a:ext>
+            </a:extLst>
+          </p:cNvPr>
+          <p:cNvPicPr>
+            <a:picLocks noChangeAspect="1"/>
+          </p:cNvPicPr>
+          <p:nvPr/>
+        </p:nvPicPr>
+        <p:blipFill>
+          <a:blip r:embed="rId2"/>
+          <a:stretch>
+            <a:fillRect/>
+          </a:stretch>
+        </p:blipFill>
+        <p:spPr>
+          <a:xfrm>
+            <a:off x="6096001" y="2687637"/>
+            <a:ext cx="6096000" cy="2724994"/>
+          </a:xfrm>
+          <a:prstGeom prst="rect">
+            <a:avLst/>
+          </a:prstGeom>
+        </p:spPr>
+      </p:pic>
+      <p:pic>
+        <p:nvPicPr>
+          <p:cNvPr id="13" name="Picture 12">
+            <a:extLst>
+              <a:ext uri="{FF2B5EF4-FFF2-40B4-BE49-F238E27FC236}">
+                <a16:creationId xmlns:a16="http://schemas.microsoft.com/office/drawing/2014/main" id="{B9EF3E27-642D-CD78-223A-3B1D6B070E75}"/>
+              </a:ext>
+            </a:extLst>
+          </p:cNvPr>
+          <p:cNvPicPr>
+            <a:picLocks noChangeAspect="1"/>
+          </p:cNvPicPr>
+          <p:nvPr/>
+        </p:nvPicPr>
+        <p:blipFill>
+          <a:blip r:embed="rId3"/>
+          <a:stretch>
+            <a:fillRect/>
+          </a:stretch>
+        </p:blipFill>
+        <p:spPr>
+          <a:xfrm>
+            <a:off x="1847809" y="5856571"/>
+            <a:ext cx="10300171" cy="636304"/>
+          </a:xfrm>
+          <a:prstGeom prst="rect">
+            <a:avLst/>
+          </a:prstGeom>
+        </p:spPr>
+      </p:pic>
+    </p:spTree>
+    <p:extLst>
+      <p:ext uri="{BB962C8B-B14F-4D97-AF65-F5344CB8AC3E}">
+        <p14:creationId xmlns:p14="http://schemas.microsoft.com/office/powerpoint/2010/main" val="1743946096"/>
+      </p:ext>
+    </p:extLst>
+  </p:cSld>
+  <p:clrMapOvr>
+    <a:masterClrMapping/>
+  </p:clrMapOvr>
+</p:sld>
+</file>
+
+<file path=ppt/slides/slide11.xml><?xml version="1.0" encoding="utf-8"?>
+<p:sld xmlns:a="http://schemas.openxmlformats.org/drawingml/2006/main" xmlns:r="http://schemas.openxmlformats.org/officeDocument/2006/relationships" xmlns:p="http://schemas.openxmlformats.org/presentationml/2006/main">
+  <p:cSld>
+    <p:spTree>
+      <p:nvGrpSpPr>
+        <p:cNvPr id="1" name="">
+          <a:extLst>
+            <a:ext uri="{FF2B5EF4-FFF2-40B4-BE49-F238E27FC236}">
+              <a16:creationId xmlns:a16="http://schemas.microsoft.com/office/drawing/2014/main" id="{66D80680-B14C-9988-E5F3-89CB02136565}"/>
+            </a:ext>
+          </a:extLst>
+        </p:cNvPr>
+        <p:cNvGrpSpPr/>
+        <p:nvPr/>
+      </p:nvGrpSpPr>
+      <p:grpSpPr>
+        <a:xfrm>
+          <a:off x="0" y="0"/>
+          <a:ext cx="0" cy="0"/>
+          <a:chOff x="0" y="0"/>
+          <a:chExt cx="0" cy="0"/>
+        </a:xfrm>
+      </p:grpSpPr>
+      <p:sp>
+        <p:nvSpPr>
+          <p:cNvPr id="2" name="Title 1">
+            <a:extLst>
+              <a:ext uri="{FF2B5EF4-FFF2-40B4-BE49-F238E27FC236}">
+                <a16:creationId xmlns:a16="http://schemas.microsoft.com/office/drawing/2014/main" id="{650F8DF8-BED6-DEEC-B4B8-684F3CFC5C75}"/>
+              </a:ext>
+            </a:extLst>
+          </p:cNvPr>
+          <p:cNvSpPr>
+            <a:spLocks noGrp="1"/>
+          </p:cNvSpPr>
+          <p:nvPr>
+            <p:ph type="title"/>
+          </p:nvPr>
+        </p:nvSpPr>
+        <p:spPr/>
+        <p:txBody>
+          <a:bodyPr/>
+          <a:lstStyle/>
+          <a:p>
+            <a:r>
+              <a:rPr lang="nl-NL" dirty="0"/>
+              <a:t>Cheatsheet 1:N</a:t>
+            </a:r>
+          </a:p>
+        </p:txBody>
+      </p:sp>
+      <p:sp>
+        <p:nvSpPr>
+          <p:cNvPr id="3" name="Content Placeholder 2">
+            <a:extLst>
+              <a:ext uri="{FF2B5EF4-FFF2-40B4-BE49-F238E27FC236}">
+                <a16:creationId xmlns:a16="http://schemas.microsoft.com/office/drawing/2014/main" id="{3174F9E4-9FE4-796A-DD58-92CC42117A66}"/>
+              </a:ext>
+            </a:extLst>
+          </p:cNvPr>
+          <p:cNvSpPr>
+            <a:spLocks noGrp="1"/>
+          </p:cNvSpPr>
+          <p:nvPr>
+            <p:ph idx="1"/>
+          </p:nvPr>
+        </p:nvSpPr>
+        <p:spPr>
+          <a:xfrm>
+            <a:off x="838200" y="1825625"/>
+            <a:ext cx="3973644" cy="2686414"/>
+          </a:xfrm>
+        </p:spPr>
+        <p:txBody>
+          <a:bodyPr>
+            <a:normAutofit/>
+          </a:bodyPr>
+          <a:lstStyle/>
+          <a:p>
+            <a:r>
+              <a:rPr lang="en-US" dirty="0"/>
+              <a:t>Voor </a:t>
+            </a:r>
+            <a:r>
+              <a:rPr lang="en-US" dirty="0" err="1"/>
+              <a:t>elke</a:t>
+            </a:r>
+            <a:r>
+              <a:rPr lang="en-US" dirty="0"/>
+              <a:t> 1:n </a:t>
+            </a:r>
+            <a:r>
+              <a:rPr lang="en-US" dirty="0" err="1"/>
+              <a:t>relatie</a:t>
+            </a:r>
+            <a:endParaRPr lang="nl-NL" dirty="0"/>
+          </a:p>
+        </p:txBody>
+      </p:sp>
+      <p:pic>
+        <p:nvPicPr>
+          <p:cNvPr id="5" name="Picture 4">
+            <a:extLst>
+              <a:ext uri="{FF2B5EF4-FFF2-40B4-BE49-F238E27FC236}">
+                <a16:creationId xmlns:a16="http://schemas.microsoft.com/office/drawing/2014/main" id="{D1838C3B-8299-B72B-54E6-585B80495083}"/>
+              </a:ext>
+            </a:extLst>
+          </p:cNvPr>
+          <p:cNvPicPr>
+            <a:picLocks noChangeAspect="1"/>
+          </p:cNvPicPr>
+          <p:nvPr/>
+        </p:nvPicPr>
+        <p:blipFill>
+          <a:blip r:embed="rId2"/>
+          <a:stretch>
+            <a:fillRect/>
+          </a:stretch>
+        </p:blipFill>
+        <p:spPr>
+          <a:xfrm>
+            <a:off x="6220292" y="154586"/>
+            <a:ext cx="4616581" cy="6949692"/>
+          </a:xfrm>
+          <a:prstGeom prst="rect">
+            <a:avLst/>
+          </a:prstGeom>
+        </p:spPr>
+      </p:pic>
+      <p:sp>
+        <p:nvSpPr>
+          <p:cNvPr id="7" name="Rectangle 6">
+            <a:extLst>
+              <a:ext uri="{FF2B5EF4-FFF2-40B4-BE49-F238E27FC236}">
+                <a16:creationId xmlns:a16="http://schemas.microsoft.com/office/drawing/2014/main" id="{FF9F002E-8A4B-45AC-EDA2-DD1ECCFCE73E}"/>
+              </a:ext>
+            </a:extLst>
+          </p:cNvPr>
+          <p:cNvSpPr/>
+          <p:nvPr/>
+        </p:nvSpPr>
+        <p:spPr>
+          <a:xfrm>
+            <a:off x="9667913" y="1238445"/>
+            <a:ext cx="2068643" cy="1325563"/>
+          </a:xfrm>
+          <a:prstGeom prst="rect">
+            <a:avLst/>
+          </a:prstGeom>
+        </p:spPr>
+        <p:style>
+          <a:lnRef idx="2">
+            <a:schemeClr val="accent1">
+              <a:shade val="15000"/>
+            </a:schemeClr>
+          </a:lnRef>
+          <a:fillRef idx="1">
+            <a:schemeClr val="accent1"/>
+          </a:fillRef>
+          <a:effectRef idx="0">
+            <a:schemeClr val="accent1"/>
+          </a:effectRef>
+          <a:fontRef idx="minor">
+            <a:schemeClr val="lt1"/>
+          </a:fontRef>
+        </p:style>
+        <p:txBody>
+          <a:bodyPr rtlCol="0" anchor="ctr"/>
+          <a:lstStyle/>
+          <a:p>
+            <a:pPr algn="ctr"/>
+            <a:r>
+              <a:rPr lang="nl-NL" dirty="0"/>
+              <a:t>Brand </a:t>
+            </a:r>
+            <a:r>
+              <a:rPr lang="nl-NL" dirty="0" err="1"/>
+              <a:t>belongs</a:t>
+            </a:r>
+            <a:r>
+              <a:rPr lang="nl-NL" dirty="0"/>
+              <a:t> </a:t>
+            </a:r>
+            <a:r>
+              <a:rPr lang="nl-NL" dirty="0" err="1"/>
+              <a:t>to</a:t>
+            </a:r>
+            <a:r>
+              <a:rPr lang="nl-NL" dirty="0"/>
+              <a:t> company</a:t>
+            </a:r>
+          </a:p>
+        </p:txBody>
+      </p:sp>
+      <p:sp>
+        <p:nvSpPr>
+          <p:cNvPr id="9" name="Rectangle 8">
+            <a:extLst>
+              <a:ext uri="{FF2B5EF4-FFF2-40B4-BE49-F238E27FC236}">
+                <a16:creationId xmlns:a16="http://schemas.microsoft.com/office/drawing/2014/main" id="{A22581E4-237D-1120-8503-2E4B664D9895}"/>
+              </a:ext>
+            </a:extLst>
+          </p:cNvPr>
+          <p:cNvSpPr/>
+          <p:nvPr/>
+        </p:nvSpPr>
+        <p:spPr>
+          <a:xfrm>
+            <a:off x="9667913" y="4634460"/>
+            <a:ext cx="2068643" cy="1325563"/>
+          </a:xfrm>
+          <a:prstGeom prst="rect">
+            <a:avLst/>
+          </a:prstGeom>
+        </p:spPr>
+        <p:style>
+          <a:lnRef idx="2">
+            <a:schemeClr val="accent1">
+              <a:shade val="15000"/>
+            </a:schemeClr>
+          </a:lnRef>
+          <a:fillRef idx="1">
+            <a:schemeClr val="accent1"/>
+          </a:fillRef>
+          <a:effectRef idx="0">
+            <a:schemeClr val="accent1"/>
+          </a:effectRef>
+          <a:fontRef idx="minor">
+            <a:schemeClr val="lt1"/>
+          </a:fontRef>
+        </p:style>
+        <p:txBody>
+          <a:bodyPr rtlCol="0" anchor="ctr"/>
+          <a:lstStyle/>
+          <a:p>
+            <a:pPr algn="ctr"/>
+            <a:r>
+              <a:rPr lang="nl-NL" dirty="0"/>
+              <a:t>Company </a:t>
+            </a:r>
+            <a:r>
+              <a:rPr lang="nl-NL" dirty="0" err="1"/>
+              <a:t>hasmany</a:t>
+            </a:r>
+            <a:r>
+              <a:rPr lang="nl-NL" dirty="0"/>
+              <a:t> </a:t>
+            </a:r>
+            <a:r>
+              <a:rPr lang="nl-NL" dirty="0" err="1"/>
+              <a:t>brands</a:t>
+            </a:r>
+            <a:endParaRPr lang="nl-NL" dirty="0"/>
+          </a:p>
+        </p:txBody>
+      </p:sp>
+    </p:spTree>
+    <p:extLst>
+      <p:ext uri="{BB962C8B-B14F-4D97-AF65-F5344CB8AC3E}">
+        <p14:creationId xmlns:p14="http://schemas.microsoft.com/office/powerpoint/2010/main" val="1752108050"/>
+      </p:ext>
+    </p:extLst>
+  </p:cSld>
+  <p:clrMapOvr>
+    <a:masterClrMapping/>
+  </p:clrMapOvr>
+</p:sld>
+</file>
+
 <file path=ppt/slides/slide2.xml><?xml version="1.0" encoding="utf-8"?>
 <p:sld xmlns:a="http://schemas.openxmlformats.org/drawingml/2006/main" xmlns:r="http://schemas.openxmlformats.org/officeDocument/2006/relationships" xmlns:p="http://schemas.openxmlformats.org/presentationml/2006/main">
   <p:cSld>
@@ -4785,7 +5445,7 @@
         <p:cNvPr id="1" name="">
           <a:extLst>
             <a:ext uri="{FF2B5EF4-FFF2-40B4-BE49-F238E27FC236}">
-              <a16:creationId xmlns:a16="http://schemas.microsoft.com/office/drawing/2014/main" id="{66D80680-B14C-9988-E5F3-89CB02136565}"/>
+              <a16:creationId xmlns:a16="http://schemas.microsoft.com/office/drawing/2014/main" id="{F98AF92B-42DE-0C3E-AC0D-9DCAB35F74DA}"/>
             </a:ext>
           </a:extLst>
         </p:cNvPr>
@@ -4805,7 +5465,7 @@
           <p:cNvPr id="2" name="Title 1">
             <a:extLst>
               <a:ext uri="{FF2B5EF4-FFF2-40B4-BE49-F238E27FC236}">
-                <a16:creationId xmlns:a16="http://schemas.microsoft.com/office/drawing/2014/main" id="{650F8DF8-BED6-DEEC-B4B8-684F3CFC5C75}"/>
+                <a16:creationId xmlns:a16="http://schemas.microsoft.com/office/drawing/2014/main" id="{7E314DAE-0A48-B16E-D1B5-72584A28BE97}"/>
               </a:ext>
             </a:extLst>
           </p:cNvPr>
@@ -4823,7 +5483,7 @@
           <a:p>
             <a:r>
               <a:rPr lang="nl-NL" dirty="0"/>
-              <a:t>Cheatsheet 1:N</a:t>
+              <a:t>Let op</a:t>
             </a:r>
           </a:p>
         </p:txBody>
@@ -4833,7 +5493,7 @@
           <p:cNvPr id="3" name="Content Placeholder 2">
             <a:extLst>
               <a:ext uri="{FF2B5EF4-FFF2-40B4-BE49-F238E27FC236}">
-                <a16:creationId xmlns:a16="http://schemas.microsoft.com/office/drawing/2014/main" id="{3174F9E4-9FE4-796A-DD58-92CC42117A66}"/>
+                <a16:creationId xmlns:a16="http://schemas.microsoft.com/office/drawing/2014/main" id="{D56B0860-ECED-4907-589D-BCE4AC59A132}"/>
               </a:ext>
             </a:extLst>
           </p:cNvPr>
@@ -4846,197 +5506,262 @@
         </p:nvSpPr>
         <p:spPr>
           <a:xfrm>
-            <a:off x="838200" y="1825625"/>
-            <a:ext cx="3973644" cy="2686414"/>
+            <a:off x="838199" y="1825625"/>
+            <a:ext cx="10764187" cy="1831975"/>
           </a:xfrm>
         </p:spPr>
         <p:txBody>
           <a:bodyPr>
-            <a:normAutofit/>
+            <a:normAutofit lnSpcReduction="10000"/>
           </a:bodyPr>
           <a:lstStyle/>
           <a:p>
             <a:r>
+              <a:rPr lang="en-US" dirty="0" err="1"/>
+              <a:t>Zie</a:t>
+            </a:r>
+            <a:r>
               <a:rPr lang="en-US" dirty="0"/>
-              <a:t>Voor </a:t>
+              <a:t> je </a:t>
             </a:r>
             <a:r>
               <a:rPr lang="en-US" dirty="0" err="1"/>
-              <a:t>elke</a:t>
+              <a:t>dat</a:t>
             </a:r>
             <a:r>
               <a:rPr lang="en-US" dirty="0"/>
-              <a:t> 1:n </a:t>
+              <a:t> de </a:t>
             </a:r>
             <a:r>
               <a:rPr lang="en-US" dirty="0" err="1"/>
-              <a:t>relatie</a:t>
-            </a:r>
-            <a:endParaRPr lang="nl-NL" dirty="0"/>
-          </a:p>
-        </p:txBody>
-      </p:sp>
-      <p:pic>
-        <p:nvPicPr>
-          <p:cNvPr id="5" name="Picture 4">
-            <a:extLst>
-              <a:ext uri="{FF2B5EF4-FFF2-40B4-BE49-F238E27FC236}">
-                <a16:creationId xmlns:a16="http://schemas.microsoft.com/office/drawing/2014/main" id="{D1838C3B-8299-B72B-54E6-585B80495083}"/>
-              </a:ext>
-            </a:extLst>
-          </p:cNvPr>
-          <p:cNvPicPr>
-            <a:picLocks noChangeAspect="1"/>
-          </p:cNvPicPr>
+              <a:t>eerste</a:t>
+            </a:r>
+            <a:r>
+              <a:rPr lang="en-US" dirty="0"/>
+              <a:t> </a:t>
+            </a:r>
+            <a:r>
+              <a:rPr lang="en-US" dirty="0" err="1"/>
+              <a:t>een</a:t>
+            </a:r>
+            <a:r>
+              <a:rPr lang="en-US" dirty="0"/>
+              <a:t> :: is?</a:t>
+            </a:r>
+          </a:p>
+          <a:p>
+            <a:r>
+              <a:rPr lang="en-US" dirty="0"/>
+              <a:t>En de </a:t>
+            </a:r>
+            <a:r>
+              <a:rPr lang="en-US" dirty="0" err="1"/>
+              <a:t>tweede</a:t>
+            </a:r>
+            <a:r>
+              <a:rPr lang="en-US" dirty="0"/>
+              <a:t> </a:t>
+            </a:r>
+            <a:r>
+              <a:rPr lang="en-US" dirty="0" err="1"/>
+              <a:t>een</a:t>
+            </a:r>
+            <a:r>
+              <a:rPr lang="en-US" dirty="0"/>
+              <a:t> -&gt;</a:t>
+            </a:r>
+          </a:p>
+          <a:p>
+            <a:r>
+              <a:rPr lang="nl-NL" dirty="0"/>
+              <a:t>Je gaat van </a:t>
+            </a:r>
+            <a:r>
+              <a:rPr lang="nl-NL" dirty="0" err="1"/>
+              <a:t>static</a:t>
+            </a:r>
+            <a:r>
+              <a:rPr lang="nl-NL" dirty="0"/>
+              <a:t> (:</a:t>
+            </a:r>
+            <a:r>
+              <a:rPr lang="nl-NL" dirty="0">
+                <a:sym typeface="Wingdings" panose="05000000000000000000" pitchFamily="2" charset="2"/>
+              </a:rPr>
+              <a:t>:) </a:t>
+            </a:r>
+            <a:r>
+              <a:rPr lang="nl-NL" dirty="0"/>
+              <a:t>naar een instance (-&gt;)</a:t>
+            </a:r>
+          </a:p>
+          <a:p>
+            <a:pPr lvl="1"/>
+            <a:r>
+              <a:rPr lang="nl-NL" dirty="0"/>
+              <a:t>Regel: de eerste is op de CLASS dus :: daarna is alles een -&gt;</a:t>
+            </a:r>
+          </a:p>
+        </p:txBody>
+      </p:sp>
+      <p:grpSp>
+        <p:nvGrpSpPr>
+          <p:cNvPr id="9" name="Group 8">
+            <a:extLst>
+              <a:ext uri="{FF2B5EF4-FFF2-40B4-BE49-F238E27FC236}">
+                <a16:creationId xmlns:a16="http://schemas.microsoft.com/office/drawing/2014/main" id="{BE656D77-3065-8C69-F676-955D22119FAB}"/>
+              </a:ext>
+            </a:extLst>
+          </p:cNvPr>
+          <p:cNvGrpSpPr/>
           <p:nvPr/>
-        </p:nvPicPr>
-        <p:blipFill>
-          <a:blip r:embed="rId2"/>
-          <a:stretch>
-            <a:fillRect/>
-          </a:stretch>
-        </p:blipFill>
-        <p:spPr>
+        </p:nvGrpSpPr>
+        <p:grpSpPr>
           <a:xfrm>
-            <a:off x="6220292" y="154586"/>
-            <a:ext cx="4616581" cy="6949692"/>
+            <a:off x="838199" y="5200772"/>
+            <a:ext cx="9920629" cy="1097457"/>
+            <a:chOff x="838199" y="5200772"/>
+            <a:chExt cx="9920629" cy="1097457"/>
           </a:xfrm>
-          <a:prstGeom prst="rect">
-            <a:avLst/>
-          </a:prstGeom>
-        </p:spPr>
-      </p:pic>
-      <p:sp>
-        <p:nvSpPr>
-          <p:cNvPr id="7" name="Rectangle 6">
-            <a:extLst>
-              <a:ext uri="{FF2B5EF4-FFF2-40B4-BE49-F238E27FC236}">
-                <a16:creationId xmlns:a16="http://schemas.microsoft.com/office/drawing/2014/main" id="{FF9F002E-8A4B-45AC-EDA2-DD1ECCFCE73E}"/>
-              </a:ext>
-            </a:extLst>
-          </p:cNvPr>
-          <p:cNvSpPr/>
-          <p:nvPr/>
-        </p:nvSpPr>
-        <p:spPr>
-          <a:xfrm>
-            <a:off x="9667913" y="1238445"/>
-            <a:ext cx="2068643" cy="1325563"/>
-          </a:xfrm>
-          <a:prstGeom prst="rect">
-            <a:avLst/>
-          </a:prstGeom>
-        </p:spPr>
-        <p:style>
-          <a:lnRef idx="2">
-            <a:schemeClr val="accent1">
-              <a:shade val="15000"/>
-            </a:schemeClr>
-          </a:lnRef>
-          <a:fillRef idx="1">
-            <a:schemeClr val="accent1"/>
-          </a:fillRef>
-          <a:effectRef idx="0">
-            <a:schemeClr val="accent1"/>
-          </a:effectRef>
-          <a:fontRef idx="minor">
-            <a:schemeClr val="lt1"/>
-          </a:fontRef>
-        </p:style>
-        <p:txBody>
-          <a:bodyPr rtlCol="0" anchor="ctr"/>
-          <a:lstStyle/>
-          <a:p>
-            <a:pPr algn="ctr"/>
-            <a:r>
-              <a:rPr lang="nl-NL" dirty="0"/>
-              <a:t>Brand </a:t>
-            </a:r>
-            <a:r>
-              <a:rPr lang="nl-NL" dirty="0" err="1"/>
-              <a:t>belongs</a:t>
-            </a:r>
-            <a:r>
-              <a:rPr lang="nl-NL" dirty="0"/>
-              <a:t> </a:t>
-            </a:r>
-            <a:r>
-              <a:rPr lang="nl-NL" dirty="0" err="1"/>
-              <a:t>to</a:t>
-            </a:r>
-            <a:r>
-              <a:rPr lang="nl-NL" dirty="0"/>
-              <a:t> company</a:t>
-            </a:r>
-          </a:p>
-        </p:txBody>
-      </p:sp>
-      <p:sp>
-        <p:nvSpPr>
-          <p:cNvPr id="9" name="Rectangle 8">
-            <a:extLst>
-              <a:ext uri="{FF2B5EF4-FFF2-40B4-BE49-F238E27FC236}">
-                <a16:creationId xmlns:a16="http://schemas.microsoft.com/office/drawing/2014/main" id="{A22581E4-237D-1120-8503-2E4B664D9895}"/>
-              </a:ext>
-            </a:extLst>
-          </p:cNvPr>
-          <p:cNvSpPr/>
-          <p:nvPr/>
-        </p:nvSpPr>
-        <p:spPr>
-          <a:xfrm>
-            <a:off x="9667913" y="4634460"/>
-            <a:ext cx="2068643" cy="1325563"/>
-          </a:xfrm>
-          <a:prstGeom prst="rect">
-            <a:avLst/>
-          </a:prstGeom>
-        </p:spPr>
-        <p:style>
-          <a:lnRef idx="2">
-            <a:schemeClr val="accent1">
-              <a:shade val="15000"/>
-            </a:schemeClr>
-          </a:lnRef>
-          <a:fillRef idx="1">
-            <a:schemeClr val="accent1"/>
-          </a:fillRef>
-          <a:effectRef idx="0">
-            <a:schemeClr val="accent1"/>
-          </a:effectRef>
-          <a:fontRef idx="minor">
-            <a:schemeClr val="lt1"/>
-          </a:fontRef>
-        </p:style>
-        <p:txBody>
-          <a:bodyPr rtlCol="0" anchor="ctr"/>
-          <a:lstStyle/>
-          <a:p>
-            <a:pPr algn="ctr"/>
-            <a:r>
-              <a:rPr lang="nl-NL" dirty="0"/>
-              <a:t>Company </a:t>
-            </a:r>
-            <a:r>
-              <a:rPr lang="nl-NL" dirty="0" err="1"/>
-              <a:t>hasmany</a:t>
-            </a:r>
-            <a:r>
-              <a:rPr lang="nl-NL" dirty="0"/>
-              <a:t> </a:t>
-            </a:r>
-            <a:r>
-              <a:rPr lang="nl-NL" dirty="0" err="1"/>
-              <a:t>brands</a:t>
-            </a:r>
-            <a:endParaRPr lang="nl-NL" dirty="0"/>
-          </a:p>
-        </p:txBody>
-      </p:sp>
+        </p:grpSpPr>
+        <p:pic>
+          <p:nvPicPr>
+            <p:cNvPr id="4" name="Picture 3">
+              <a:extLst>
+                <a:ext uri="{FF2B5EF4-FFF2-40B4-BE49-F238E27FC236}">
+                  <a16:creationId xmlns:a16="http://schemas.microsoft.com/office/drawing/2014/main" id="{7BF2199A-BCA9-AA0E-DE77-FD7F69D70777}"/>
+                </a:ext>
+              </a:extLst>
+            </p:cNvPr>
+            <p:cNvPicPr>
+              <a:picLocks noChangeAspect="1"/>
+            </p:cNvPicPr>
+            <p:nvPr/>
+          </p:nvPicPr>
+          <p:blipFill>
+            <a:blip r:embed="rId2"/>
+            <a:srcRect t="42803"/>
+            <a:stretch>
+              <a:fillRect/>
+            </a:stretch>
+          </p:blipFill>
+          <p:spPr>
+            <a:xfrm>
+              <a:off x="838199" y="5200772"/>
+              <a:ext cx="9920629" cy="1097457"/>
+            </a:xfrm>
+            <a:prstGeom prst="rect">
+              <a:avLst/>
+            </a:prstGeom>
+          </p:spPr>
+        </p:pic>
+        <mc:AlternateContent xmlns:mc="http://schemas.openxmlformats.org/markup-compatibility/2006">
+          <mc:Choice xmlns:p14="http://schemas.microsoft.com/office/powerpoint/2010/main" Requires="p14">
+            <p:contentPart p14:bwMode="auto" r:id="rId3">
+              <p14:nvContentPartPr>
+                <p14:cNvPr id="5" name="Ink 4">
+                  <a:extLst>
+                    <a:ext uri="{FF2B5EF4-FFF2-40B4-BE49-F238E27FC236}">
+                      <a16:creationId xmlns:a16="http://schemas.microsoft.com/office/drawing/2014/main" id="{B9B3C4BB-1E01-B331-6B45-C31885BF301B}"/>
+                    </a:ext>
+                  </a:extLst>
+                </p14:cNvPr>
+                <p14:cNvContentPartPr/>
+                <p14:nvPr/>
+              </p14:nvContentPartPr>
+              <p14:xfrm>
+                <a:off x="5359224" y="5857325"/>
+                <a:ext cx="414000" cy="42120"/>
+              </p14:xfrm>
+            </p:contentPart>
+          </mc:Choice>
+          <mc:Fallback>
+            <p:pic>
+              <p:nvPicPr>
+                <p:cNvPr id="5" name="Ink 4">
+                  <a:extLst>
+                    <a:ext uri="{FF2B5EF4-FFF2-40B4-BE49-F238E27FC236}">
+                      <a16:creationId xmlns:a16="http://schemas.microsoft.com/office/drawing/2014/main" id="{B9B3C4BB-1E01-B331-6B45-C31885BF301B}"/>
+                    </a:ext>
+                  </a:extLst>
+                </p:cNvPr>
+                <p:cNvPicPr/>
+                <p:nvPr/>
+              </p:nvPicPr>
+              <p:blipFill>
+                <a:blip r:embed="rId4"/>
+                <a:stretch>
+                  <a:fillRect/>
+                </a:stretch>
+              </p:blipFill>
+              <p:spPr>
+                <a:xfrm>
+                  <a:off x="5350584" y="5848325"/>
+                  <a:ext cx="431640" cy="59760"/>
+                </a:xfrm>
+                <a:prstGeom prst="rect">
+                  <a:avLst/>
+                </a:prstGeom>
+              </p:spPr>
+            </p:pic>
+          </mc:Fallback>
+        </mc:AlternateContent>
+        <mc:AlternateContent xmlns:mc="http://schemas.openxmlformats.org/markup-compatibility/2006">
+          <mc:Choice xmlns:p14="http://schemas.microsoft.com/office/powerpoint/2010/main" Requires="p14">
+            <p:contentPart p14:bwMode="auto" r:id="rId5">
+              <p14:nvContentPartPr>
+                <p14:cNvPr id="7" name="Ink 6">
+                  <a:extLst>
+                    <a:ext uri="{FF2B5EF4-FFF2-40B4-BE49-F238E27FC236}">
+                      <a16:creationId xmlns:a16="http://schemas.microsoft.com/office/drawing/2014/main" id="{ED677332-2367-8600-041F-A134C87B06E6}"/>
+                    </a:ext>
+                  </a:extLst>
+                </p14:cNvPr>
+                <p14:cNvContentPartPr/>
+                <p14:nvPr/>
+              </p14:nvContentPartPr>
+              <p14:xfrm>
+                <a:off x="8600304" y="5829965"/>
+                <a:ext cx="376200" cy="36000"/>
+              </p14:xfrm>
+            </p:contentPart>
+          </mc:Choice>
+          <mc:Fallback>
+            <p:pic>
+              <p:nvPicPr>
+                <p:cNvPr id="7" name="Ink 6">
+                  <a:extLst>
+                    <a:ext uri="{FF2B5EF4-FFF2-40B4-BE49-F238E27FC236}">
+                      <a16:creationId xmlns:a16="http://schemas.microsoft.com/office/drawing/2014/main" id="{ED677332-2367-8600-041F-A134C87B06E6}"/>
+                    </a:ext>
+                  </a:extLst>
+                </p:cNvPr>
+                <p:cNvPicPr/>
+                <p:nvPr/>
+              </p:nvPicPr>
+              <p:blipFill>
+                <a:blip r:embed="rId6"/>
+                <a:stretch>
+                  <a:fillRect/>
+                </a:stretch>
+              </p:blipFill>
+              <p:spPr>
+                <a:xfrm>
+                  <a:off x="8591664" y="5820965"/>
+                  <a:ext cx="393840" cy="53640"/>
+                </a:xfrm>
+                <a:prstGeom prst="rect">
+                  <a:avLst/>
+                </a:prstGeom>
+              </p:spPr>
+            </p:pic>
+          </mc:Fallback>
+        </mc:AlternateContent>
+      </p:grpSp>
     </p:spTree>
     <p:extLst>
       <p:ext uri="{BB962C8B-B14F-4D97-AF65-F5344CB8AC3E}">
-        <p14:creationId xmlns:p14="http://schemas.microsoft.com/office/powerpoint/2010/main" val="1752108050"/>
+        <p14:creationId xmlns:p14="http://schemas.microsoft.com/office/powerpoint/2010/main" val="2655874426"/>
       </p:ext>
     </p:extLst>
   </p:cSld>
